--- a/downloads/DCT_V1_Ch02_Slides.pptx
+++ b/downloads/DCT_V1_Ch02_Slides.pptx
@@ -129,7 +129,7 @@
   <p:extLst>
     <p:ext uri="{521415D9-36F7-43E2-AB2F-B90AF26B5E84}">
       <p14:sectionLst xmlns:p14="http://schemas.microsoft.com/office/powerpoint/2010/main">
-        <p14:section name="Opening" id="{bdcd95ca-e5ed-9c69-61e7-f33ee9857f32}">
+        <p14:section name="Opening" id="{2d908d0d-5b94-55df-304c-86c775903889}">
           <p14:sldIdLst>
             <p14:sldId id="256"/>
             <p14:sldId id="257"/>
@@ -137,42 +137,42 @@
             <p14:sldId id="259"/>
           </p14:sldIdLst>
         </p14:section>
-        <p14:section name="2.1 Systems Thinking and Enterprise Analysis" id="{1bf8f536-f049-b828-da23-77e3dec0c183}">
+        <p14:section name="2.1 Systems Thinking and Enterprise Analysis" id="{8943c4ca-046e-dfc4-4c79-be565a00202c}">
           <p14:sldIdLst>
             <p14:sldId id="260"/>
           </p14:sldIdLst>
         </p14:section>
-        <p14:section name="2.2 The Enterprise as an Open System" id="{ac037c27-8d1b-b45b-c9be-9ced97adf06b}">
+        <p14:section name="2.2 The Enterprise as an Open System" id="{0b196500-03a6-d15c-6956-0b5db903dd3e}">
           <p14:sldIdLst>
             <p14:sldId id="261"/>
             <p14:sldId id="262"/>
             <p14:sldId id="263"/>
           </p14:sldIdLst>
         </p14:section>
-        <p14:section name="2.3 Enterprise Boundaries and Environment" id="{f730f852-4cc1-23af-54ff-0bd2ad4a0df0}">
+        <p14:section name="2.3 Enterprise Boundaries and Environment" id="{1e37667e-41d2-cca4-f925-b537fe5cbec1}">
           <p14:sldIdLst>
             <p14:sldId id="264"/>
           </p14:sldIdLst>
         </p14:section>
-        <p14:section name="2.4 Hierarchy and Subsystems" id="{2fa75c1f-9438-fd90-5cb6-8e27c7b1ae55}">
+        <p14:section name="2.4 Hierarchy and Subsystems" id="{39722b26-47de-8300-d15c-2af327fe8623}">
           <p14:sldIdLst>
             <p14:sldId id="265"/>
             <p14:sldId id="266"/>
           </p14:sldIdLst>
         </p14:section>
-        <p14:section name="2.5 Feedback, Adaptation, and Control" id="{6eb5397c-64fe-eba9-b6f7-a6dd94293cd9}">
+        <p14:section name="2.5 Feedback, Adaptation, and Control" id="{a37cfd64-f88b-5488-7b94-3c5be24cd85f}">
           <p14:sldIdLst>
             <p14:sldId id="267"/>
             <p14:sldId id="268"/>
           </p14:sldIdLst>
         </p14:section>
-        <p14:section name="2.6 Enterprise Transformation" id="{1b6d4a95-a3ad-72b9-68d5-ebf42ecbe3e7}">
+        <p14:section name="2.6 Enterprise Transformation" id="{263f670f-af9c-9d3e-fc55-00e158513acc}">
           <p14:sldIdLst>
             <p14:sldId id="269"/>
             <p14:sldId id="270"/>
           </p14:sldIdLst>
         </p14:section>
-        <p14:section name="Worked Example 2.1" id="{0cb1287e-8064-03bf-5e7f-5eba9a751ef9}">
+        <p14:section name="Worked Example 2.1" id="{f5a72a56-585b-f83b-fe24-44137a06ad95}">
           <p14:sldIdLst>
             <p14:sldId id="271"/>
             <p14:sldId id="272"/>
@@ -180,12 +180,12 @@
             <p14:sldId id="274"/>
           </p14:sldIdLst>
         </p14:section>
-        <p14:section name="AXIOM Lab 1.2" id="{27dbd424-f5da-b03a-c64a-7affc63f08ac}">
+        <p14:section name="AXIOM Lab 1.2" id="{da32c71d-9eb8-da7f-c180-51407e229ac9}">
           <p14:sldIdLst>
             <p14:sldId id="275"/>
           </p14:sldIdLst>
         </p14:section>
-        <p14:section name="Close" id="{9d03089d-9ad1-f7bc-13b9-52f6127eeb82}">
+        <p14:section name="Close" id="{dbceda7a-6c12-77da-009e-565ede2ba405}">
           <p14:sldIdLst>
             <p14:sldId id="276"/>
             <p14:sldId id="277"/>

--- a/downloads/DCT_V1_Ch02_Slides.pptx
+++ b/downloads/DCT_V1_Ch02_Slides.pptx
@@ -129,7 +129,7 @@
   <p:extLst>
     <p:ext uri="{521415D9-36F7-43E2-AB2F-B90AF26B5E84}">
       <p14:sectionLst xmlns:p14="http://schemas.microsoft.com/office/powerpoint/2010/main">
-        <p14:section name="Opening" id="{2d908d0d-5b94-55df-304c-86c775903889}">
+        <p14:section name="Opening" id="{b52b982d-d43d-23f6-c18e-3d1825f1e29c}">
           <p14:sldIdLst>
             <p14:sldId id="256"/>
             <p14:sldId id="257"/>
@@ -137,42 +137,42 @@
             <p14:sldId id="259"/>
           </p14:sldIdLst>
         </p14:section>
-        <p14:section name="2.1 Systems Thinking and Enterprise Analysis" id="{8943c4ca-046e-dfc4-4c79-be565a00202c}">
+        <p14:section name="2.1 Systems Thinking and Enterprise Analysis" id="{5290528d-a436-0a05-13cb-f9ad4f99b1f5}">
           <p14:sldIdLst>
             <p14:sldId id="260"/>
           </p14:sldIdLst>
         </p14:section>
-        <p14:section name="2.2 The Enterprise as an Open System" id="{0b196500-03a6-d15c-6956-0b5db903dd3e}">
+        <p14:section name="2.2 The Enterprise as an Open System" id="{88a7dbf2-30b3-3edd-474b-db831fff4973}">
           <p14:sldIdLst>
             <p14:sldId id="261"/>
             <p14:sldId id="262"/>
             <p14:sldId id="263"/>
           </p14:sldIdLst>
         </p14:section>
-        <p14:section name="2.3 Enterprise Boundaries and Environment" id="{1e37667e-41d2-cca4-f925-b537fe5cbec1}">
+        <p14:section name="2.3 Enterprise Boundaries and Environment" id="{28c7eb3a-a1b0-98a4-eed5-b8f7d0ae5c27}">
           <p14:sldIdLst>
             <p14:sldId id="264"/>
           </p14:sldIdLst>
         </p14:section>
-        <p14:section name="2.4 Hierarchy and Subsystems" id="{39722b26-47de-8300-d15c-2af327fe8623}">
+        <p14:section name="2.4 Hierarchy and Subsystems" id="{57af9e79-eb3c-87c5-534a-43203b6cf3ee}">
           <p14:sldIdLst>
             <p14:sldId id="265"/>
             <p14:sldId id="266"/>
           </p14:sldIdLst>
         </p14:section>
-        <p14:section name="2.5 Feedback, Adaptation, and Control" id="{a37cfd64-f88b-5488-7b94-3c5be24cd85f}">
+        <p14:section name="2.5 Feedback, Adaptation, and Control" id="{f0aeb4a3-c454-4cd7-0c23-0f5b6168c90e}">
           <p14:sldIdLst>
             <p14:sldId id="267"/>
             <p14:sldId id="268"/>
           </p14:sldIdLst>
         </p14:section>
-        <p14:section name="2.6 Enterprise Transformation" id="{263f670f-af9c-9d3e-fc55-00e158513acc}">
+        <p14:section name="2.6 Enterprise Transformation" id="{5a5f989a-fb30-371d-5d5b-bef4305e2330}">
           <p14:sldIdLst>
             <p14:sldId id="269"/>
             <p14:sldId id="270"/>
           </p14:sldIdLst>
         </p14:section>
-        <p14:section name="Worked Example 2.1" id="{f5a72a56-585b-f83b-fe24-44137a06ad95}">
+        <p14:section name="Worked Example 2.1" id="{8c70ac2c-f260-440f-3661-8b9a390b46f7}">
           <p14:sldIdLst>
             <p14:sldId id="271"/>
             <p14:sldId id="272"/>
@@ -180,12 +180,12 @@
             <p14:sldId id="274"/>
           </p14:sldIdLst>
         </p14:section>
-        <p14:section name="AXIOM Lab 1.2" id="{da32c71d-9eb8-da7f-c180-51407e229ac9}">
+        <p14:section name="AXIOM Lab 1.2" id="{29b4e9ac-c57f-6324-640e-6f688f8c84ce}">
           <p14:sldIdLst>
             <p14:sldId id="275"/>
           </p14:sldIdLst>
         </p14:section>
-        <p14:section name="Close" id="{dbceda7a-6c12-77da-009e-565ede2ba405}">
+        <p14:section name="Close" id="{b9bdd00d-fb6e-239b-cf4d-8ab52fef83ae}">
           <p14:sldIdLst>
             <p14:sldId id="276"/>
             <p14:sldId id="277"/>
